--- a/Planning docs/Slides/lesson-12-1-teacher-slides.pptx
+++ b/Planning docs/Slides/lesson-12-1-teacher-slides.pptx
@@ -4902,7 +4902,7 @@
                 <a:ea typeface="Calibri" pitchFamily="34" charset="-122"/>
                 <a:cs typeface="Calibri" pitchFamily="34" charset="-120"/>
               </a:rPr>
-              <a:t>•  What does the dungeon do to the characters inside it?</a:t>
+              <a:t>•  Despereaux reaches the dungeon. What does he see, smell, and hear? How does the author's setting description affect the mood?</a:t>
             </a:r>
             <a:endParaRPr lang="en-US" sz="1500" dirty="0"/>
           </a:p>
@@ -4919,24 +4919,7 @@
                 <a:ea typeface="Calibri" pitchFamily="34" charset="-122"/>
                 <a:cs typeface="Calibri" pitchFamily="34" charset="-120"/>
               </a:rPr>
-              <a:t>•  How does the castle above compare to the dungeon below?</a:t>
-            </a:r>
-            <a:endParaRPr lang="en-US" sz="1500" dirty="0"/>
-          </a:p>
-          <a:p>
-            <a:pPr indent="0" marL="0">
-              <a:buNone/>
-            </a:pPr>
-            <a:r>
-              <a:rPr lang="en-US" sz="1500" dirty="0">
-                <a:solidFill>
-                  <a:srgbClr val="1E293B"/>
-                </a:solidFill>
-                <a:latin typeface="Calibri" pitchFamily="34" charset="0"/>
-                <a:ea typeface="Calibri" pitchFamily="34" charset="-122"/>
-                <a:cs typeface="Calibri" pitchFamily="34" charset="-120"/>
-              </a:rPr>
-              <a:t>•  What sensory details make each setting feel real?</a:t>
+              <a:t>•  The princess hears Despereaux. How does she respond? What does this tell us about her character?</a:t>
             </a:r>
             <a:endParaRPr lang="en-US" sz="1500" dirty="0"/>
           </a:p>
